--- a/doc/Slide_Pertemuan_2_Pemrograman_Mobile_II.pptx
+++ b/doc/Slide_Pertemuan_2_Pemrograman_Mobile_II.pptx
@@ -8909,7 +8909,12 @@
           <a:lstStyle/>
           <a:p>
             <a:r>
-              <a:t>Apa itu Functional Component?</a:t>
+              <a:rPr dirty="0" err="1"/>
+              <a:t>Apa</a:t>
+            </a:r>
+            <a:r>
+              <a:rPr dirty="0"/>
+              <a:t> itu Functional Component?</a:t>
             </a:r>
           </a:p>
         </p:txBody>
